--- a/ppt/MLOps09-Container.pptx
+++ b/ppt/MLOps09-Container.pptx
@@ -5,10 +5,10 @@
     <p:sldMasterId id="2147483653" r:id="rId1"/>
   </p:sldMasterIdLst>
   <p:notesMasterIdLst>
-    <p:notesMasterId r:id="rId33"/>
+    <p:notesMasterId r:id="rId34"/>
   </p:notesMasterIdLst>
   <p:handoutMasterIdLst>
-    <p:handoutMasterId r:id="rId34"/>
+    <p:handoutMasterId r:id="rId35"/>
   </p:handoutMasterIdLst>
   <p:sldIdLst>
     <p:sldId id="264" r:id="rId2"/>
@@ -34,14 +34,15 @@
     <p:sldId id="369" r:id="rId22"/>
     <p:sldId id="288" r:id="rId23"/>
     <p:sldId id="372" r:id="rId24"/>
-    <p:sldId id="371" r:id="rId25"/>
-    <p:sldId id="376" r:id="rId26"/>
-    <p:sldId id="373" r:id="rId27"/>
-    <p:sldId id="378" r:id="rId28"/>
-    <p:sldId id="379" r:id="rId29"/>
-    <p:sldId id="377" r:id="rId30"/>
-    <p:sldId id="374" r:id="rId31"/>
-    <p:sldId id="375" r:id="rId32"/>
+    <p:sldId id="380" r:id="rId25"/>
+    <p:sldId id="371" r:id="rId26"/>
+    <p:sldId id="376" r:id="rId27"/>
+    <p:sldId id="373" r:id="rId28"/>
+    <p:sldId id="378" r:id="rId29"/>
+    <p:sldId id="379" r:id="rId30"/>
+    <p:sldId id="377" r:id="rId31"/>
+    <p:sldId id="374" r:id="rId32"/>
+    <p:sldId id="375" r:id="rId33"/>
   </p:sldIdLst>
   <p:sldSz cx="9144000" cy="6858000" type="screen4x3"/>
   <p:notesSz cx="6648450" cy="9782175"/>
@@ -5902,6 +5903,122 @@
           <p:cNvPr id="2" name="Titre 1">
             <a:extLst>
               <a:ext uri="{FF2B5EF4-FFF2-40B4-BE49-F238E27FC236}">
+                <a16:creationId xmlns:a16="http://schemas.microsoft.com/office/drawing/2014/main" id="{71ADF6C4-EFDE-81BF-C69B-AA9D68548EAE}"/>
+              </a:ext>
+            </a:extLst>
+          </p:cNvPr>
+          <p:cNvSpPr>
+            <a:spLocks noGrp="1"/>
+          </p:cNvSpPr>
+          <p:nvPr>
+            <p:ph type="title"/>
+          </p:nvPr>
+        </p:nvSpPr>
+        <p:spPr/>
+        <p:txBody>
+          <a:bodyPr/>
+          <a:lstStyle/>
+          <a:p>
+            <a:r>
+              <a:rPr lang="fr-FR" dirty="0"/>
+              <a:t>NAT</a:t>
+            </a:r>
+          </a:p>
+        </p:txBody>
+      </p:sp>
+      <p:sp>
+        <p:nvSpPr>
+          <p:cNvPr id="3" name="Espace réservé du contenu 2">
+            <a:extLst>
+              <a:ext uri="{FF2B5EF4-FFF2-40B4-BE49-F238E27FC236}">
+                <a16:creationId xmlns:a16="http://schemas.microsoft.com/office/drawing/2014/main" id="{225F9DAE-D364-2C92-D2CF-087B1AB9047E}"/>
+              </a:ext>
+            </a:extLst>
+          </p:cNvPr>
+          <p:cNvSpPr>
+            <a:spLocks noGrp="1"/>
+          </p:cNvSpPr>
+          <p:nvPr>
+            <p:ph idx="1"/>
+          </p:nvPr>
+        </p:nvSpPr>
+        <p:spPr/>
+        <p:txBody>
+          <a:bodyPr/>
+          <a:lstStyle/>
+          <a:p>
+            <a:r>
+              <a:rPr lang="fr-FR" dirty="0"/>
+              <a:t>Network </a:t>
+            </a:r>
+            <a:r>
+              <a:rPr lang="fr-FR" dirty="0" err="1"/>
+              <a:t>Adress</a:t>
+            </a:r>
+            <a:r>
+              <a:rPr lang="fr-FR" dirty="0"/>
+              <a:t> Translation</a:t>
+            </a:r>
+          </a:p>
+          <a:p>
+            <a:pPr lvl="1"/>
+            <a:r>
+              <a:rPr lang="fr-FR" dirty="0"/>
+              <a:t>Permet d'effectuer une redirection de port</a:t>
+            </a:r>
+          </a:p>
+          <a:p>
+            <a:pPr lvl="1"/>
+            <a:r>
+              <a:rPr lang="fr-FR" dirty="0"/>
+              <a:t>Option –p 80:8000</a:t>
+            </a:r>
+          </a:p>
+          <a:p>
+            <a:pPr lvl="1"/>
+            <a:endParaRPr lang="fr-FR" dirty="0"/>
+          </a:p>
+          <a:p>
+            <a:pPr lvl="1"/>
+            <a:endParaRPr lang="fr-FR" dirty="0"/>
+          </a:p>
+        </p:txBody>
+      </p:sp>
+    </p:spTree>
+    <p:extLst>
+      <p:ext uri="{BB962C8B-B14F-4D97-AF65-F5344CB8AC3E}">
+        <p14:creationId xmlns:p14="http://schemas.microsoft.com/office/powerpoint/2010/main" val="2716590562"/>
+      </p:ext>
+    </p:extLst>
+  </p:cSld>
+  <p:clrMapOvr>
+    <a:masterClrMapping/>
+  </p:clrMapOvr>
+</p:sld>
+</file>
+
+<file path=ppt/slides/slide25.xml><?xml version="1.0" encoding="utf-8"?>
+<p:sld xmlns:a="http://schemas.openxmlformats.org/drawingml/2006/main" xmlns:r="http://schemas.openxmlformats.org/officeDocument/2006/relationships" xmlns:p="http://schemas.openxmlformats.org/presentationml/2006/main">
+  <p:cSld>
+    <p:spTree>
+      <p:nvGrpSpPr>
+        <p:cNvPr id="1" name=""/>
+        <p:cNvGrpSpPr/>
+        <p:nvPr/>
+      </p:nvGrpSpPr>
+      <p:grpSpPr>
+        <a:xfrm>
+          <a:off x="0" y="0"/>
+          <a:ext cx="0" cy="0"/>
+          <a:chOff x="0" y="0"/>
+          <a:chExt cx="0" cy="0"/>
+        </a:xfrm>
+      </p:grpSpPr>
+      <p:sp>
+        <p:nvSpPr>
+          <p:cNvPr id="2" name="Titre 1">
+            <a:extLst>
+              <a:ext uri="{FF2B5EF4-FFF2-40B4-BE49-F238E27FC236}">
                 <a16:creationId xmlns:a16="http://schemas.microsoft.com/office/drawing/2014/main" id="{E0A97A73-A818-F21B-0D01-95E80BC38639}"/>
               </a:ext>
             </a:extLst>
@@ -6052,7 +6169,7 @@
 </p:sld>
 </file>
 
-<file path=ppt/slides/slide25.xml><?xml version="1.0" encoding="utf-8"?>
+<file path=ppt/slides/slide26.xml><?xml version="1.0" encoding="utf-8"?>
 <p:sld xmlns:a="http://schemas.openxmlformats.org/drawingml/2006/main" xmlns:r="http://schemas.openxmlformats.org/officeDocument/2006/relationships" xmlns:p="http://schemas.openxmlformats.org/presentationml/2006/main">
   <p:cSld>
     <p:spTree>
@@ -6264,7 +6381,7 @@
 </p:sld>
 </file>
 
-<file path=ppt/slides/slide26.xml><?xml version="1.0" encoding="utf-8"?>
+<file path=ppt/slides/slide27.xml><?xml version="1.0" encoding="utf-8"?>
 <p:sld xmlns:a="http://schemas.openxmlformats.org/drawingml/2006/main" xmlns:r="http://schemas.openxmlformats.org/officeDocument/2006/relationships" xmlns:p="http://schemas.openxmlformats.org/presentationml/2006/main">
   <p:cSld>
     <p:spTree>
@@ -6424,7 +6541,7 @@
 </p:sld>
 </file>
 
-<file path=ppt/slides/slide27.xml><?xml version="1.0" encoding="utf-8"?>
+<file path=ppt/slides/slide28.xml><?xml version="1.0" encoding="utf-8"?>
 <p:sld xmlns:a="http://schemas.openxmlformats.org/drawingml/2006/main" xmlns:r="http://schemas.openxmlformats.org/officeDocument/2006/relationships" xmlns:p="http://schemas.openxmlformats.org/presentationml/2006/main">
   <p:cSld>
     <p:spTree>
@@ -6541,7 +6658,7 @@
 </p:sld>
 </file>
 
-<file path=ppt/slides/slide28.xml><?xml version="1.0" encoding="utf-8"?>
+<file path=ppt/slides/slide29.xml><?xml version="1.0" encoding="utf-8"?>
 <p:sld xmlns:a="http://schemas.openxmlformats.org/drawingml/2006/main" xmlns:r="http://schemas.openxmlformats.org/officeDocument/2006/relationships" xmlns:p="http://schemas.openxmlformats.org/presentationml/2006/main">
   <p:cSld>
     <p:spTree>
@@ -6649,7 +6766,154 @@
 </p:sld>
 </file>
 
-<file path=ppt/slides/slide29.xml><?xml version="1.0" encoding="utf-8"?>
+<file path=ppt/slides/slide3.xml><?xml version="1.0" encoding="utf-8"?>
+<p:sld xmlns:a="http://schemas.openxmlformats.org/drawingml/2006/main" xmlns:r="http://schemas.openxmlformats.org/officeDocument/2006/relationships" xmlns:p="http://schemas.openxmlformats.org/presentationml/2006/main">
+  <p:cSld>
+    <p:spTree>
+      <p:nvGrpSpPr>
+        <p:cNvPr id="1" name=""/>
+        <p:cNvGrpSpPr/>
+        <p:nvPr/>
+      </p:nvGrpSpPr>
+      <p:grpSpPr>
+        <a:xfrm>
+          <a:off x="0" y="0"/>
+          <a:ext cx="0" cy="0"/>
+          <a:chOff x="0" y="0"/>
+          <a:chExt cx="0" cy="0"/>
+        </a:xfrm>
+      </p:grpSpPr>
+      <p:sp>
+        <p:nvSpPr>
+          <p:cNvPr id="2" name="Titre 1">
+            <a:extLst>
+              <a:ext uri="{FF2B5EF4-FFF2-40B4-BE49-F238E27FC236}">
+                <a16:creationId xmlns:a16="http://schemas.microsoft.com/office/drawing/2014/main" id="{3A22D1B0-D225-AF12-B07D-AE796A92E172}"/>
+              </a:ext>
+            </a:extLst>
+          </p:cNvPr>
+          <p:cNvSpPr>
+            <a:spLocks noGrp="1"/>
+          </p:cNvSpPr>
+          <p:nvPr>
+            <p:ph type="title"/>
+          </p:nvPr>
+        </p:nvSpPr>
+        <p:spPr/>
+        <p:txBody>
+          <a:bodyPr/>
+          <a:lstStyle/>
+          <a:p>
+            <a:r>
+              <a:rPr lang="fr-FR" dirty="0"/>
+              <a:t>Le mur de la confusion</a:t>
+            </a:r>
+          </a:p>
+        </p:txBody>
+      </p:sp>
+      <p:sp>
+        <p:nvSpPr>
+          <p:cNvPr id="3" name="Espace réservé du contenu 2">
+            <a:extLst>
+              <a:ext uri="{FF2B5EF4-FFF2-40B4-BE49-F238E27FC236}">
+                <a16:creationId xmlns:a16="http://schemas.microsoft.com/office/drawing/2014/main" id="{3C0E8835-D19A-50E2-8328-A00FF137C319}"/>
+              </a:ext>
+            </a:extLst>
+          </p:cNvPr>
+          <p:cNvSpPr>
+            <a:spLocks noGrp="1"/>
+          </p:cNvSpPr>
+          <p:nvPr>
+            <p:ph idx="1"/>
+          </p:nvPr>
+        </p:nvSpPr>
+        <p:spPr/>
+        <p:txBody>
+          <a:bodyPr/>
+          <a:lstStyle/>
+          <a:p>
+            <a:r>
+              <a:rPr lang="fr-FR" dirty="0"/>
+              <a:t>Il faut savoir qu'à cette époque, l'informatique d'entreprise a "siloté" les aspects dev et </a:t>
+            </a:r>
+            <a:r>
+              <a:rPr lang="fr-FR" dirty="0" err="1"/>
+              <a:t>ops</a:t>
+            </a:r>
+            <a:r>
+              <a:rPr lang="fr-FR" dirty="0"/>
+              <a:t> des applications, en plaçant les responsabilités respectives dans des équipes séparées</a:t>
+            </a:r>
+          </a:p>
+          <a:p>
+            <a:r>
+              <a:rPr lang="fr-FR" dirty="0"/>
+              <a:t>Il s'est alors créé ce qu'on appelle le mur de la confusion. Ce mur est apparu car les deux équipes ont des objectifs respectifs antagonistes.</a:t>
+            </a:r>
+          </a:p>
+        </p:txBody>
+      </p:sp>
+      <p:pic>
+        <p:nvPicPr>
+          <p:cNvPr id="1026" name="Picture 2" descr="Le mur de la confusion entre les équipes Dev et Ops">
+            <a:extLst>
+              <a:ext uri="{FF2B5EF4-FFF2-40B4-BE49-F238E27FC236}">
+                <a16:creationId xmlns:a16="http://schemas.microsoft.com/office/drawing/2014/main" id="{7ED0BEE7-5774-D00B-8D13-52A4F967257C}"/>
+              </a:ext>
+            </a:extLst>
+          </p:cNvPr>
+          <p:cNvPicPr>
+            <a:picLocks noChangeAspect="1" noChangeArrowheads="1"/>
+          </p:cNvPicPr>
+          <p:nvPr/>
+        </p:nvPicPr>
+        <p:blipFill>
+          <a:blip r:embed="rId2">
+            <a:extLst>
+              <a:ext uri="{28A0092B-C50C-407E-A947-70E740481C1C}">
+                <a14:useLocalDpi xmlns:a14="http://schemas.microsoft.com/office/drawing/2010/main" val="0"/>
+              </a:ext>
+            </a:extLst>
+          </a:blip>
+          <a:srcRect/>
+          <a:stretch>
+            <a:fillRect/>
+          </a:stretch>
+        </p:blipFill>
+        <p:spPr bwMode="auto">
+          <a:xfrm>
+            <a:off x="2347975" y="4641563"/>
+            <a:ext cx="3160130" cy="1780546"/>
+          </a:xfrm>
+          <a:prstGeom prst="rect">
+            <a:avLst/>
+          </a:prstGeom>
+          <a:noFill/>
+          <a:extLst>
+            <a:ext uri="{909E8E84-426E-40DD-AFC4-6F175D3DCCD1}">
+              <a14:hiddenFill xmlns:a14="http://schemas.microsoft.com/office/drawing/2010/main">
+                <a:solidFill>
+                  <a:srgbClr val="FFFFFF"/>
+                </a:solidFill>
+              </a14:hiddenFill>
+            </a:ext>
+          </a:extLst>
+        </p:spPr>
+      </p:pic>
+    </p:spTree>
+    <p:extLst>
+      <p:ext uri="{BB962C8B-B14F-4D97-AF65-F5344CB8AC3E}">
+        <p14:creationId xmlns:p14="http://schemas.microsoft.com/office/powerpoint/2010/main" val="558847619"/>
+      </p:ext>
+    </p:extLst>
+  </p:cSld>
+  <p:clrMapOvr>
+    <a:masterClrMapping/>
+  </p:clrMapOvr>
+</p:sld>
+</file>
+
+<file path=ppt/slides/slide30.xml><?xml version="1.0" encoding="utf-8"?>
 <p:sld xmlns:a="http://schemas.openxmlformats.org/drawingml/2006/main" xmlns:r="http://schemas.openxmlformats.org/officeDocument/2006/relationships" xmlns:p="http://schemas.openxmlformats.org/presentationml/2006/main">
   <p:cSld>
     <p:spTree>
@@ -7403,154 +7667,7 @@
 </p:sld>
 </file>
 
-<file path=ppt/slides/slide3.xml><?xml version="1.0" encoding="utf-8"?>
-<p:sld xmlns:a="http://schemas.openxmlformats.org/drawingml/2006/main" xmlns:r="http://schemas.openxmlformats.org/officeDocument/2006/relationships" xmlns:p="http://schemas.openxmlformats.org/presentationml/2006/main">
-  <p:cSld>
-    <p:spTree>
-      <p:nvGrpSpPr>
-        <p:cNvPr id="1" name=""/>
-        <p:cNvGrpSpPr/>
-        <p:nvPr/>
-      </p:nvGrpSpPr>
-      <p:grpSpPr>
-        <a:xfrm>
-          <a:off x="0" y="0"/>
-          <a:ext cx="0" cy="0"/>
-          <a:chOff x="0" y="0"/>
-          <a:chExt cx="0" cy="0"/>
-        </a:xfrm>
-      </p:grpSpPr>
-      <p:sp>
-        <p:nvSpPr>
-          <p:cNvPr id="2" name="Titre 1">
-            <a:extLst>
-              <a:ext uri="{FF2B5EF4-FFF2-40B4-BE49-F238E27FC236}">
-                <a16:creationId xmlns:a16="http://schemas.microsoft.com/office/drawing/2014/main" id="{3A22D1B0-D225-AF12-B07D-AE796A92E172}"/>
-              </a:ext>
-            </a:extLst>
-          </p:cNvPr>
-          <p:cNvSpPr>
-            <a:spLocks noGrp="1"/>
-          </p:cNvSpPr>
-          <p:nvPr>
-            <p:ph type="title"/>
-          </p:nvPr>
-        </p:nvSpPr>
-        <p:spPr/>
-        <p:txBody>
-          <a:bodyPr/>
-          <a:lstStyle/>
-          <a:p>
-            <a:r>
-              <a:rPr lang="fr-FR" dirty="0"/>
-              <a:t>Le mur de la confusion</a:t>
-            </a:r>
-          </a:p>
-        </p:txBody>
-      </p:sp>
-      <p:sp>
-        <p:nvSpPr>
-          <p:cNvPr id="3" name="Espace réservé du contenu 2">
-            <a:extLst>
-              <a:ext uri="{FF2B5EF4-FFF2-40B4-BE49-F238E27FC236}">
-                <a16:creationId xmlns:a16="http://schemas.microsoft.com/office/drawing/2014/main" id="{3C0E8835-D19A-50E2-8328-A00FF137C319}"/>
-              </a:ext>
-            </a:extLst>
-          </p:cNvPr>
-          <p:cNvSpPr>
-            <a:spLocks noGrp="1"/>
-          </p:cNvSpPr>
-          <p:nvPr>
-            <p:ph idx="1"/>
-          </p:nvPr>
-        </p:nvSpPr>
-        <p:spPr/>
-        <p:txBody>
-          <a:bodyPr/>
-          <a:lstStyle/>
-          <a:p>
-            <a:r>
-              <a:rPr lang="fr-FR" dirty="0"/>
-              <a:t>Il faut savoir qu'à cette époque, l'informatique d'entreprise a "siloté" les aspects dev et </a:t>
-            </a:r>
-            <a:r>
-              <a:rPr lang="fr-FR" dirty="0" err="1"/>
-              <a:t>ops</a:t>
-            </a:r>
-            <a:r>
-              <a:rPr lang="fr-FR" dirty="0"/>
-              <a:t> des applications, en plaçant les responsabilités respectives dans des équipes séparées</a:t>
-            </a:r>
-          </a:p>
-          <a:p>
-            <a:r>
-              <a:rPr lang="fr-FR" dirty="0"/>
-              <a:t>Il s'est alors créé ce qu'on appelle le mur de la confusion. Ce mur est apparu car les deux équipes ont des objectifs respectifs antagonistes.</a:t>
-            </a:r>
-          </a:p>
-        </p:txBody>
-      </p:sp>
-      <p:pic>
-        <p:nvPicPr>
-          <p:cNvPr id="1026" name="Picture 2" descr="Le mur de la confusion entre les équipes Dev et Ops">
-            <a:extLst>
-              <a:ext uri="{FF2B5EF4-FFF2-40B4-BE49-F238E27FC236}">
-                <a16:creationId xmlns:a16="http://schemas.microsoft.com/office/drawing/2014/main" id="{7ED0BEE7-5774-D00B-8D13-52A4F967257C}"/>
-              </a:ext>
-            </a:extLst>
-          </p:cNvPr>
-          <p:cNvPicPr>
-            <a:picLocks noChangeAspect="1" noChangeArrowheads="1"/>
-          </p:cNvPicPr>
-          <p:nvPr/>
-        </p:nvPicPr>
-        <p:blipFill>
-          <a:blip r:embed="rId2">
-            <a:extLst>
-              <a:ext uri="{28A0092B-C50C-407E-A947-70E740481C1C}">
-                <a14:useLocalDpi xmlns:a14="http://schemas.microsoft.com/office/drawing/2010/main" val="0"/>
-              </a:ext>
-            </a:extLst>
-          </a:blip>
-          <a:srcRect/>
-          <a:stretch>
-            <a:fillRect/>
-          </a:stretch>
-        </p:blipFill>
-        <p:spPr bwMode="auto">
-          <a:xfrm>
-            <a:off x="2347975" y="4641563"/>
-            <a:ext cx="3160130" cy="1780546"/>
-          </a:xfrm>
-          <a:prstGeom prst="rect">
-            <a:avLst/>
-          </a:prstGeom>
-          <a:noFill/>
-          <a:extLst>
-            <a:ext uri="{909E8E84-426E-40DD-AFC4-6F175D3DCCD1}">
-              <a14:hiddenFill xmlns:a14="http://schemas.microsoft.com/office/drawing/2010/main">
-                <a:solidFill>
-                  <a:srgbClr val="FFFFFF"/>
-                </a:solidFill>
-              </a14:hiddenFill>
-            </a:ext>
-          </a:extLst>
-        </p:spPr>
-      </p:pic>
-    </p:spTree>
-    <p:extLst>
-      <p:ext uri="{BB962C8B-B14F-4D97-AF65-F5344CB8AC3E}">
-        <p14:creationId xmlns:p14="http://schemas.microsoft.com/office/powerpoint/2010/main" val="558847619"/>
-      </p:ext>
-    </p:extLst>
-  </p:cSld>
-  <p:clrMapOvr>
-    <a:masterClrMapping/>
-  </p:clrMapOvr>
-</p:sld>
-</file>
-
-<file path=ppt/slides/slide30.xml><?xml version="1.0" encoding="utf-8"?>
+<file path=ppt/slides/slide31.xml><?xml version="1.0" encoding="utf-8"?>
 <p:sld xmlns:a="http://schemas.openxmlformats.org/drawingml/2006/main" xmlns:r="http://schemas.openxmlformats.org/officeDocument/2006/relationships" xmlns:p="http://schemas.openxmlformats.org/presentationml/2006/main">
   <p:cSld>
     <p:spTree>
@@ -7661,7 +7778,7 @@
 </p:sld>
 </file>
 
-<file path=ppt/slides/slide31.xml><?xml version="1.0" encoding="utf-8"?>
+<file path=ppt/slides/slide32.xml><?xml version="1.0" encoding="utf-8"?>
 <p:sld xmlns:a="http://schemas.openxmlformats.org/drawingml/2006/main" xmlns:r="http://schemas.openxmlformats.org/officeDocument/2006/relationships" xmlns:p="http://schemas.openxmlformats.org/presentationml/2006/main">
   <p:cSld>
     <p:spTree>

--- a/ppt/MLOps09-Container.pptx
+++ b/ppt/MLOps09-Container.pptx
@@ -5,10 +5,10 @@
     <p:sldMasterId id="2147483653" r:id="rId1"/>
   </p:sldMasterIdLst>
   <p:notesMasterIdLst>
-    <p:notesMasterId r:id="rId34"/>
+    <p:notesMasterId r:id="rId35"/>
   </p:notesMasterIdLst>
   <p:handoutMasterIdLst>
-    <p:handoutMasterId r:id="rId35"/>
+    <p:handoutMasterId r:id="rId36"/>
   </p:handoutMasterIdLst>
   <p:sldIdLst>
     <p:sldId id="264" r:id="rId2"/>
@@ -40,9 +40,10 @@
     <p:sldId id="373" r:id="rId28"/>
     <p:sldId id="378" r:id="rId29"/>
     <p:sldId id="379" r:id="rId30"/>
-    <p:sldId id="377" r:id="rId31"/>
-    <p:sldId id="374" r:id="rId32"/>
-    <p:sldId id="375" r:id="rId33"/>
+    <p:sldId id="381" r:id="rId31"/>
+    <p:sldId id="377" r:id="rId32"/>
+    <p:sldId id="374" r:id="rId33"/>
+    <p:sldId id="375" r:id="rId34"/>
   </p:sldIdLst>
   <p:sldSz cx="9144000" cy="6858000" type="screen4x3"/>
   <p:notesSz cx="6648450" cy="9782175"/>
@@ -6935,6 +6936,136 @@
           <p:cNvPr id="2" name="Titre 1">
             <a:extLst>
               <a:ext uri="{FF2B5EF4-FFF2-40B4-BE49-F238E27FC236}">
+                <a16:creationId xmlns:a16="http://schemas.microsoft.com/office/drawing/2014/main" id="{8AB975BF-B60A-BC81-475F-0B45BD9AEC9C}"/>
+              </a:ext>
+            </a:extLst>
+          </p:cNvPr>
+          <p:cNvSpPr>
+            <a:spLocks noGrp="1"/>
+          </p:cNvSpPr>
+          <p:nvPr>
+            <p:ph type="title"/>
+          </p:nvPr>
+        </p:nvSpPr>
+        <p:spPr/>
+        <p:txBody>
+          <a:bodyPr/>
+          <a:lstStyle/>
+          <a:p>
+            <a:r>
+              <a:rPr lang="fr-FR" dirty="0"/>
+              <a:t>NGINX</a:t>
+            </a:r>
+          </a:p>
+        </p:txBody>
+      </p:sp>
+      <p:sp>
+        <p:nvSpPr>
+          <p:cNvPr id="3" name="Espace réservé du contenu 2">
+            <a:extLst>
+              <a:ext uri="{FF2B5EF4-FFF2-40B4-BE49-F238E27FC236}">
+                <a16:creationId xmlns:a16="http://schemas.microsoft.com/office/drawing/2014/main" id="{0CD03A7F-C76E-8340-406F-A9C0C0EA2E83}"/>
+              </a:ext>
+            </a:extLst>
+          </p:cNvPr>
+          <p:cNvSpPr>
+            <a:spLocks noGrp="1"/>
+          </p:cNvSpPr>
+          <p:nvPr>
+            <p:ph idx="1"/>
+          </p:nvPr>
+        </p:nvSpPr>
+        <p:spPr/>
+        <p:txBody>
+          <a:bodyPr/>
+          <a:lstStyle/>
+          <a:p>
+            <a:r>
+              <a:rPr lang="fr-FR" dirty="0"/>
+              <a:t>Serveur Web</a:t>
+            </a:r>
+          </a:p>
+          <a:p>
+            <a:pPr lvl="1"/>
+            <a:r>
+              <a:rPr lang="fr-FR" dirty="0"/>
+              <a:t>Multi thread</a:t>
+            </a:r>
+          </a:p>
+          <a:p>
+            <a:pPr lvl="1"/>
+            <a:r>
+              <a:rPr lang="fr-FR" dirty="0"/>
+              <a:t>Multi process</a:t>
+            </a:r>
+          </a:p>
+        </p:txBody>
+      </p:sp>
+      <p:pic>
+        <p:nvPicPr>
+          <p:cNvPr id="5" name="Image 4">
+            <a:extLst>
+              <a:ext uri="{FF2B5EF4-FFF2-40B4-BE49-F238E27FC236}">
+                <a16:creationId xmlns:a16="http://schemas.microsoft.com/office/drawing/2014/main" id="{1D32B7CF-107E-0AEB-ACD7-DEDDF1525364}"/>
+              </a:ext>
+            </a:extLst>
+          </p:cNvPr>
+          <p:cNvPicPr>
+            <a:picLocks noChangeAspect="1"/>
+          </p:cNvPicPr>
+          <p:nvPr/>
+        </p:nvPicPr>
+        <p:blipFill>
+          <a:blip r:embed="rId2"/>
+          <a:stretch>
+            <a:fillRect/>
+          </a:stretch>
+        </p:blipFill>
+        <p:spPr>
+          <a:xfrm>
+            <a:off x="6588224" y="1916832"/>
+            <a:ext cx="1467055" cy="314369"/>
+          </a:xfrm>
+          <a:prstGeom prst="rect">
+            <a:avLst/>
+          </a:prstGeom>
+        </p:spPr>
+      </p:pic>
+    </p:spTree>
+    <p:extLst>
+      <p:ext uri="{BB962C8B-B14F-4D97-AF65-F5344CB8AC3E}">
+        <p14:creationId xmlns:p14="http://schemas.microsoft.com/office/powerpoint/2010/main" val="1262369887"/>
+      </p:ext>
+    </p:extLst>
+  </p:cSld>
+  <p:clrMapOvr>
+    <a:masterClrMapping/>
+  </p:clrMapOvr>
+</p:sld>
+</file>
+
+<file path=ppt/slides/slide31.xml><?xml version="1.0" encoding="utf-8"?>
+<p:sld xmlns:a="http://schemas.openxmlformats.org/drawingml/2006/main" xmlns:r="http://schemas.openxmlformats.org/officeDocument/2006/relationships" xmlns:p="http://schemas.openxmlformats.org/presentationml/2006/main">
+  <p:cSld>
+    <p:spTree>
+      <p:nvGrpSpPr>
+        <p:cNvPr id="1" name=""/>
+        <p:cNvGrpSpPr/>
+        <p:nvPr/>
+      </p:nvGrpSpPr>
+      <p:grpSpPr>
+        <a:xfrm>
+          <a:off x="0" y="0"/>
+          <a:ext cx="0" cy="0"/>
+          <a:chOff x="0" y="0"/>
+          <a:chExt cx="0" cy="0"/>
+        </a:xfrm>
+      </p:grpSpPr>
+      <p:sp>
+        <p:nvSpPr>
+          <p:cNvPr id="2" name="Titre 1">
+            <a:extLst>
+              <a:ext uri="{FF2B5EF4-FFF2-40B4-BE49-F238E27FC236}">
                 <a16:creationId xmlns:a16="http://schemas.microsoft.com/office/drawing/2014/main" id="{EFD1C4A0-C825-B7C9-F4C5-35A7A2023BA2}"/>
               </a:ext>
             </a:extLst>
@@ -7667,7 +7798,7 @@
 </p:sld>
 </file>
 
-<file path=ppt/slides/slide31.xml><?xml version="1.0" encoding="utf-8"?>
+<file path=ppt/slides/slide32.xml><?xml version="1.0" encoding="utf-8"?>
 <p:sld xmlns:a="http://schemas.openxmlformats.org/drawingml/2006/main" xmlns:r="http://schemas.openxmlformats.org/officeDocument/2006/relationships" xmlns:p="http://schemas.openxmlformats.org/presentationml/2006/main">
   <p:cSld>
     <p:spTree>
@@ -7778,7 +7909,7 @@
 </p:sld>
 </file>
 
-<file path=ppt/slides/slide32.xml><?xml version="1.0" encoding="utf-8"?>
+<file path=ppt/slides/slide33.xml><?xml version="1.0" encoding="utf-8"?>
 <p:sld xmlns:a="http://schemas.openxmlformats.org/drawingml/2006/main" xmlns:r="http://schemas.openxmlformats.org/officeDocument/2006/relationships" xmlns:p="http://schemas.openxmlformats.org/presentationml/2006/main">
   <p:cSld>
     <p:spTree>
